--- a/docs/ВКР_Дацюк.pptx
+++ b/docs/ВКР_Дацюк.pptx
@@ -5,7 +5,7 @@
     <p:sldMasterId id="2147483648" r:id="rId1"/>
   </p:sldMasterIdLst>
   <p:notesMasterIdLst>
-    <p:notesMasterId r:id="rId21"/>
+    <p:notesMasterId r:id="rId22"/>
   </p:notesMasterIdLst>
   <p:sldIdLst>
     <p:sldId id="305" r:id="rId2"/>
@@ -23,10 +23,11 @@
     <p:sldId id="314" r:id="rId14"/>
     <p:sldId id="319" r:id="rId15"/>
     <p:sldId id="315" r:id="rId16"/>
-    <p:sldId id="278" r:id="rId17"/>
-    <p:sldId id="316" r:id="rId18"/>
-    <p:sldId id="284" r:id="rId19"/>
-    <p:sldId id="318" r:id="rId20"/>
+    <p:sldId id="322" r:id="rId17"/>
+    <p:sldId id="278" r:id="rId18"/>
+    <p:sldId id="316" r:id="rId19"/>
+    <p:sldId id="284" r:id="rId20"/>
+    <p:sldId id="318" r:id="rId21"/>
   </p:sldIdLst>
   <p:sldSz cx="12192000" cy="6858000"/>
   <p:notesSz cx="6858000" cy="9144000"/>
@@ -2828,7 +2829,7 @@
           <a:p>
             <a:fld id="{14C4D81D-654F-48DB-A33D-3E6F325A1010}" type="datetimeFigureOut">
               <a:rPr lang="ru-RU" smtClean="0"/>
-              <a:t>04.05.2026</a:t>
+              <a:t>13.05.2026</a:t>
             </a:fld>
             <a:endParaRPr lang="ru-RU"/>
           </a:p>
@@ -3160,7 +3161,7 @@
           <a:p>
             <a:fld id="{DD093330-6B9A-4C0D-8499-7E41F07687EA}" type="slidenum">
               <a:rPr lang="ru-RU" smtClean="0"/>
-              <a:t>16</a:t>
+              <a:t>17</a:t>
             </a:fld>
             <a:endParaRPr lang="ru-RU"/>
           </a:p>
@@ -14566,7 +14567,7 @@
           <a:p>
             <a:fld id="{5E139BA1-5047-414E-8A3F-E19F7F2DED6E}" type="datetimeFigureOut">
               <a:rPr lang="ru-RU" smtClean="0"/>
-              <a:t>04.05.2026</a:t>
+              <a:t>13.05.2026</a:t>
             </a:fld>
             <a:endParaRPr lang="ru-RU"/>
           </a:p>
@@ -23998,6 +23999,1199 @@
   <p:cSld>
     <p:spTree>
       <p:nvGrpSpPr>
+        <p:cNvPr id="1" name="">
+          <a:extLst>
+            <a:ext uri="{FF2B5EF4-FFF2-40B4-BE49-F238E27FC236}">
+              <a16:creationId xmlns:a16="http://schemas.microsoft.com/office/drawing/2014/main" id="{DA12DD65-07DC-C287-ED88-D80962D6A53F}"/>
+            </a:ext>
+          </a:extLst>
+        </p:cNvPr>
+        <p:cNvGrpSpPr/>
+        <p:nvPr/>
+      </p:nvGrpSpPr>
+      <p:grpSpPr>
+        <a:xfrm>
+          <a:off x="0" y="0"/>
+          <a:ext cx="0" cy="0"/>
+          <a:chOff x="0" y="0"/>
+          <a:chExt cx="0" cy="0"/>
+        </a:xfrm>
+      </p:grpSpPr>
+      <p:sp>
+        <p:nvSpPr>
+          <p:cNvPr id="2" name="Текст 1">
+            <a:extLst>
+              <a:ext uri="{FF2B5EF4-FFF2-40B4-BE49-F238E27FC236}">
+                <a16:creationId xmlns:a16="http://schemas.microsoft.com/office/drawing/2014/main" id="{3A02A0CA-D4B5-0173-B61D-2B314C00754E}"/>
+              </a:ext>
+            </a:extLst>
+          </p:cNvPr>
+          <p:cNvSpPr>
+            <a:spLocks noGrp="1"/>
+          </p:cNvSpPr>
+          <p:nvPr>
+            <p:ph type="body" sz="quarter" idx="13"/>
+          </p:nvPr>
+        </p:nvSpPr>
+        <p:spPr/>
+        <p:txBody>
+          <a:bodyPr/>
+          <a:lstStyle/>
+          <a:p>
+            <a:r>
+              <a:rPr lang="ru-RU" dirty="0"/>
+              <a:t>Магистратура</a:t>
+            </a:r>
+          </a:p>
+          <a:p>
+            <a:r>
+              <a:rPr lang="ru-RU" dirty="0"/>
+              <a:t>«Искусственный интеллект»</a:t>
+            </a:r>
+          </a:p>
+          <a:p>
+            <a:endParaRPr lang="ru-RU" dirty="0"/>
+          </a:p>
+          <a:p>
+            <a:endParaRPr lang="ru-RU" dirty="0"/>
+          </a:p>
+        </p:txBody>
+      </p:sp>
+      <p:sp>
+        <p:nvSpPr>
+          <p:cNvPr id="3" name="Текст 2">
+            <a:extLst>
+              <a:ext uri="{FF2B5EF4-FFF2-40B4-BE49-F238E27FC236}">
+                <a16:creationId xmlns:a16="http://schemas.microsoft.com/office/drawing/2014/main" id="{5E5BD5EE-09E8-EE30-DAB8-6683E0200B16}"/>
+              </a:ext>
+            </a:extLst>
+          </p:cNvPr>
+          <p:cNvSpPr>
+            <a:spLocks noGrp="1"/>
+          </p:cNvSpPr>
+          <p:nvPr>
+            <p:ph type="body" sz="quarter" idx="14"/>
+          </p:nvPr>
+        </p:nvSpPr>
+        <p:spPr/>
+        <p:txBody>
+          <a:bodyPr/>
+          <a:lstStyle/>
+          <a:p>
+            <a:r>
+              <a:rPr lang="ru-RU" dirty="0"/>
+              <a:t>Планирование работы фрезерных станков с использованием ИИ</a:t>
+            </a:r>
+          </a:p>
+          <a:p>
+            <a:endParaRPr lang="ru-RU" dirty="0"/>
+          </a:p>
+        </p:txBody>
+      </p:sp>
+      <p:sp>
+        <p:nvSpPr>
+          <p:cNvPr id="4" name="Текст 3">
+            <a:extLst>
+              <a:ext uri="{FF2B5EF4-FFF2-40B4-BE49-F238E27FC236}">
+                <a16:creationId xmlns:a16="http://schemas.microsoft.com/office/drawing/2014/main" id="{B174B0C6-8554-066B-5D8D-813E1610F8E7}"/>
+              </a:ext>
+            </a:extLst>
+          </p:cNvPr>
+          <p:cNvSpPr>
+            <a:spLocks noGrp="1"/>
+          </p:cNvSpPr>
+          <p:nvPr>
+            <p:ph type="body" sz="quarter" idx="15"/>
+          </p:nvPr>
+        </p:nvSpPr>
+        <p:spPr/>
+        <p:txBody>
+          <a:bodyPr/>
+          <a:lstStyle/>
+          <a:p>
+            <a:r>
+              <a:rPr lang="ru-RU" dirty="0"/>
+              <a:t>Программная архитектура</a:t>
+            </a:r>
+          </a:p>
+        </p:txBody>
+      </p:sp>
+      <p:sp>
+        <p:nvSpPr>
+          <p:cNvPr id="5" name="Текст 4">
+            <a:extLst>
+              <a:ext uri="{FF2B5EF4-FFF2-40B4-BE49-F238E27FC236}">
+                <a16:creationId xmlns:a16="http://schemas.microsoft.com/office/drawing/2014/main" id="{B1ECA9C2-2D50-2BC8-5BEA-CA01A8EEA9F6}"/>
+              </a:ext>
+            </a:extLst>
+          </p:cNvPr>
+          <p:cNvSpPr>
+            <a:spLocks noGrp="1"/>
+          </p:cNvSpPr>
+          <p:nvPr>
+            <p:ph type="body" sz="quarter" idx="17"/>
+          </p:nvPr>
+        </p:nvSpPr>
+        <p:spPr>
+          <a:xfrm>
+            <a:off x="585787" y="1447064"/>
+            <a:ext cx="6824304" cy="537011"/>
+          </a:xfrm>
+        </p:spPr>
+        <p:txBody>
+          <a:bodyPr/>
+          <a:lstStyle/>
+          <a:p>
+            <a:r>
+              <a:rPr lang="ru-RU" sz="2400" dirty="0"/>
+              <a:t>Программная архитектура</a:t>
+            </a:r>
+          </a:p>
+        </p:txBody>
+      </p:sp>
+      <p:pic>
+        <p:nvPicPr>
+          <p:cNvPr id="11" name="Рисунок 10">
+            <a:extLst>
+              <a:ext uri="{FF2B5EF4-FFF2-40B4-BE49-F238E27FC236}">
+                <a16:creationId xmlns:a16="http://schemas.microsoft.com/office/drawing/2014/main" id="{89D0853D-A73E-088B-D4AF-C03C004C7325}"/>
+              </a:ext>
+            </a:extLst>
+          </p:cNvPr>
+          <p:cNvPicPr>
+            <a:picLocks noChangeAspect="1"/>
+          </p:cNvPicPr>
+          <p:nvPr/>
+        </p:nvPicPr>
+        <p:blipFill>
+          <a:blip r:embed="rId2">
+            <a:extLst>
+              <a:ext uri="{28A0092B-C50C-407E-A947-70E740481C1C}">
+                <a14:useLocalDpi xmlns:a14="http://schemas.microsoft.com/office/drawing/2010/main" val="0"/>
+              </a:ext>
+            </a:extLst>
+          </a:blip>
+          <a:srcRect/>
+          <a:stretch>
+            <a:fillRect/>
+          </a:stretch>
+        </p:blipFill>
+        <p:spPr bwMode="auto">
+          <a:xfrm>
+            <a:off x="4730619" y="4687857"/>
+            <a:ext cx="4756193" cy="1381431"/>
+          </a:xfrm>
+          <a:prstGeom prst="rect">
+            <a:avLst/>
+          </a:prstGeom>
+          <a:noFill/>
+          <a:ln>
+            <a:noFill/>
+          </a:ln>
+        </p:spPr>
+      </p:pic>
+      <p:pic>
+        <p:nvPicPr>
+          <p:cNvPr id="12" name="Рисунок 11">
+            <a:extLst>
+              <a:ext uri="{FF2B5EF4-FFF2-40B4-BE49-F238E27FC236}">
+                <a16:creationId xmlns:a16="http://schemas.microsoft.com/office/drawing/2014/main" id="{C22C2326-6673-F205-B390-349676C9D99A}"/>
+              </a:ext>
+            </a:extLst>
+          </p:cNvPr>
+          <p:cNvPicPr>
+            <a:picLocks noChangeAspect="1"/>
+          </p:cNvPicPr>
+          <p:nvPr/>
+        </p:nvPicPr>
+        <p:blipFill>
+          <a:blip r:embed="rId3" cstate="print">
+            <a:extLst>
+              <a:ext uri="{28A0092B-C50C-407E-A947-70E740481C1C}">
+                <a14:useLocalDpi xmlns:a14="http://schemas.microsoft.com/office/drawing/2010/main" val="0"/>
+              </a:ext>
+            </a:extLst>
+          </a:blip>
+          <a:srcRect/>
+          <a:stretch>
+            <a:fillRect/>
+          </a:stretch>
+        </p:blipFill>
+        <p:spPr bwMode="auto">
+          <a:xfrm>
+            <a:off x="8329992" y="2252580"/>
+            <a:ext cx="3422054" cy="1869590"/>
+          </a:xfrm>
+          <a:prstGeom prst="rect">
+            <a:avLst/>
+          </a:prstGeom>
+          <a:noFill/>
+          <a:ln>
+            <a:noFill/>
+          </a:ln>
+        </p:spPr>
+      </p:pic>
+      <p:pic>
+        <p:nvPicPr>
+          <p:cNvPr id="13" name="Рисунок 12">
+            <a:extLst>
+              <a:ext uri="{FF2B5EF4-FFF2-40B4-BE49-F238E27FC236}">
+                <a16:creationId xmlns:a16="http://schemas.microsoft.com/office/drawing/2014/main" id="{FF1E3D53-0E50-92AE-07BF-BDEAD5E02556}"/>
+              </a:ext>
+            </a:extLst>
+          </p:cNvPr>
+          <p:cNvPicPr>
+            <a:picLocks noChangeAspect="1"/>
+          </p:cNvPicPr>
+          <p:nvPr/>
+        </p:nvPicPr>
+        <p:blipFill>
+          <a:blip r:embed="rId4" cstate="print">
+            <a:extLst>
+              <a:ext uri="{28A0092B-C50C-407E-A947-70E740481C1C}">
+                <a14:useLocalDpi xmlns:a14="http://schemas.microsoft.com/office/drawing/2010/main" val="0"/>
+              </a:ext>
+            </a:extLst>
+          </a:blip>
+          <a:srcRect/>
+          <a:stretch>
+            <a:fillRect/>
+          </a:stretch>
+        </p:blipFill>
+        <p:spPr bwMode="auto">
+          <a:xfrm>
+            <a:off x="585787" y="4563894"/>
+            <a:ext cx="2708138" cy="1505394"/>
+          </a:xfrm>
+          <a:prstGeom prst="rect">
+            <a:avLst/>
+          </a:prstGeom>
+          <a:noFill/>
+          <a:ln>
+            <a:noFill/>
+          </a:ln>
+        </p:spPr>
+      </p:pic>
+      <p:pic>
+        <p:nvPicPr>
+          <p:cNvPr id="14" name="Рисунок 13">
+            <a:extLst>
+              <a:ext uri="{FF2B5EF4-FFF2-40B4-BE49-F238E27FC236}">
+                <a16:creationId xmlns:a16="http://schemas.microsoft.com/office/drawing/2014/main" id="{628A262F-825E-1FDA-8060-3397F5169D77}"/>
+              </a:ext>
+            </a:extLst>
+          </p:cNvPr>
+          <p:cNvPicPr>
+            <a:picLocks noChangeAspect="1"/>
+          </p:cNvPicPr>
+          <p:nvPr/>
+        </p:nvPicPr>
+        <p:blipFill>
+          <a:blip r:embed="rId5"/>
+          <a:stretch>
+            <a:fillRect/>
+          </a:stretch>
+        </p:blipFill>
+        <p:spPr>
+          <a:xfrm>
+            <a:off x="559925" y="2414218"/>
+            <a:ext cx="2418665" cy="1638773"/>
+          </a:xfrm>
+          <a:prstGeom prst="rect">
+            <a:avLst/>
+          </a:prstGeom>
+        </p:spPr>
+      </p:pic>
+      <p:pic>
+        <p:nvPicPr>
+          <p:cNvPr id="15" name="Рисунок 14">
+            <a:extLst>
+              <a:ext uri="{FF2B5EF4-FFF2-40B4-BE49-F238E27FC236}">
+                <a16:creationId xmlns:a16="http://schemas.microsoft.com/office/drawing/2014/main" id="{BBEAC9FF-61BC-750C-359A-1DEE83A47BCF}"/>
+              </a:ext>
+            </a:extLst>
+          </p:cNvPr>
+          <p:cNvPicPr>
+            <a:picLocks noChangeAspect="1"/>
+          </p:cNvPicPr>
+          <p:nvPr/>
+        </p:nvPicPr>
+        <p:blipFill>
+          <a:blip r:embed="rId6" cstate="print">
+            <a:extLst>
+              <a:ext uri="{28A0092B-C50C-407E-A947-70E740481C1C}">
+                <a14:useLocalDpi xmlns:a14="http://schemas.microsoft.com/office/drawing/2010/main" val="0"/>
+              </a:ext>
+            </a:extLst>
+          </a:blip>
+          <a:srcRect/>
+          <a:stretch>
+            <a:fillRect/>
+          </a:stretch>
+        </p:blipFill>
+        <p:spPr bwMode="auto">
+          <a:xfrm>
+            <a:off x="3092233" y="2346384"/>
+            <a:ext cx="1811411" cy="1775786"/>
+          </a:xfrm>
+          <a:prstGeom prst="rect">
+            <a:avLst/>
+          </a:prstGeom>
+          <a:noFill/>
+          <a:ln>
+            <a:noFill/>
+          </a:ln>
+        </p:spPr>
+      </p:pic>
+      <p:sp>
+        <p:nvSpPr>
+          <p:cNvPr id="16" name="Текст 4">
+            <a:extLst>
+              <a:ext uri="{FF2B5EF4-FFF2-40B4-BE49-F238E27FC236}">
+                <a16:creationId xmlns:a16="http://schemas.microsoft.com/office/drawing/2014/main" id="{B878C360-6620-9085-B190-18ACB4CD69FA}"/>
+              </a:ext>
+            </a:extLst>
+          </p:cNvPr>
+          <p:cNvSpPr txBox="1">
+            <a:spLocks/>
+          </p:cNvSpPr>
+          <p:nvPr/>
+        </p:nvSpPr>
+        <p:spPr>
+          <a:xfrm>
+            <a:off x="1573914" y="1918504"/>
+            <a:ext cx="3586931" cy="537011"/>
+          </a:xfrm>
+          <a:prstGeom prst="rect">
+            <a:avLst/>
+          </a:prstGeom>
+        </p:spPr>
+        <p:txBody>
+          <a:bodyPr vert="horz" lIns="0" tIns="0" rIns="0" bIns="0" rtlCol="0">
+            <a:noAutofit/>
+          </a:bodyPr>
+          <a:lstStyle>
+            <a:lvl1pPr marL="0" indent="0" algn="l" defTabSz="914400" rtl="0" eaLnBrk="1" latinLnBrk="0" hangingPunct="1">
+              <a:lnSpc>
+                <a:spcPct val="90000"/>
+              </a:lnSpc>
+              <a:spcBef>
+                <a:spcPts val="1000"/>
+              </a:spcBef>
+              <a:buFont typeface="Arial" panose="020B0604020202020204" pitchFamily="34" charset="0"/>
+              <a:buNone/>
+              <a:defRPr sz="1600" b="0" i="0" kern="1200">
+                <a:solidFill>
+                  <a:srgbClr val="0E2D69"/>
+                </a:solidFill>
+                <a:latin typeface="HSE Sans" panose="02000000000000000000" pitchFamily="2" charset="0"/>
+                <a:ea typeface="+mn-ea"/>
+                <a:cs typeface="+mn-cs"/>
+              </a:defRPr>
+            </a:lvl1pPr>
+            <a:lvl2pPr marL="685800" indent="-228600" algn="l" defTabSz="914400" rtl="0" eaLnBrk="1" latinLnBrk="0" hangingPunct="1">
+              <a:lnSpc>
+                <a:spcPct val="90000"/>
+              </a:lnSpc>
+              <a:spcBef>
+                <a:spcPts val="500"/>
+              </a:spcBef>
+              <a:buFont typeface="Arial" panose="020B0604020202020204" pitchFamily="34" charset="0"/>
+              <a:buChar char="•"/>
+              <a:defRPr sz="1600" b="0" i="0" kern="1200">
+                <a:solidFill>
+                  <a:srgbClr val="0E2D69"/>
+                </a:solidFill>
+                <a:latin typeface="HSE Sans" panose="02000000000000000000" pitchFamily="2" charset="0"/>
+                <a:ea typeface="+mn-ea"/>
+                <a:cs typeface="+mn-cs"/>
+              </a:defRPr>
+            </a:lvl2pPr>
+            <a:lvl3pPr marL="1143000" indent="-228600" algn="l" defTabSz="914400" rtl="0" eaLnBrk="1" latinLnBrk="0" hangingPunct="1">
+              <a:lnSpc>
+                <a:spcPct val="90000"/>
+              </a:lnSpc>
+              <a:spcBef>
+                <a:spcPts val="500"/>
+              </a:spcBef>
+              <a:buFont typeface="Arial" panose="020B0604020202020204" pitchFamily="34" charset="0"/>
+              <a:buChar char="•"/>
+              <a:defRPr sz="1600" b="0" i="0" kern="1200">
+                <a:solidFill>
+                  <a:srgbClr val="0E2D69"/>
+                </a:solidFill>
+                <a:latin typeface="HSE Sans" panose="02000000000000000000" pitchFamily="2" charset="0"/>
+                <a:ea typeface="+mn-ea"/>
+                <a:cs typeface="+mn-cs"/>
+              </a:defRPr>
+            </a:lvl3pPr>
+            <a:lvl4pPr marL="1600200" indent="-228600" algn="l" defTabSz="914400" rtl="0" eaLnBrk="1" latinLnBrk="0" hangingPunct="1">
+              <a:lnSpc>
+                <a:spcPct val="90000"/>
+              </a:lnSpc>
+              <a:spcBef>
+                <a:spcPts val="500"/>
+              </a:spcBef>
+              <a:buFont typeface="Arial" panose="020B0604020202020204" pitchFamily="34" charset="0"/>
+              <a:buChar char="•"/>
+              <a:defRPr sz="1600" b="0" i="0" kern="1200">
+                <a:solidFill>
+                  <a:srgbClr val="0E2D69"/>
+                </a:solidFill>
+                <a:latin typeface="HSE Sans" panose="02000000000000000000" pitchFamily="2" charset="0"/>
+                <a:ea typeface="+mn-ea"/>
+                <a:cs typeface="+mn-cs"/>
+              </a:defRPr>
+            </a:lvl4pPr>
+            <a:lvl5pPr marL="2057400" indent="-228600" algn="l" defTabSz="914400" rtl="0" eaLnBrk="1" latinLnBrk="0" hangingPunct="1">
+              <a:lnSpc>
+                <a:spcPct val="90000"/>
+              </a:lnSpc>
+              <a:spcBef>
+                <a:spcPts val="500"/>
+              </a:spcBef>
+              <a:buFont typeface="Arial" panose="020B0604020202020204" pitchFamily="34" charset="0"/>
+              <a:buChar char="•"/>
+              <a:defRPr sz="1600" b="0" i="0" kern="1200">
+                <a:solidFill>
+                  <a:srgbClr val="0E2D69"/>
+                </a:solidFill>
+                <a:latin typeface="HSE Sans" panose="02000000000000000000" pitchFamily="2" charset="0"/>
+                <a:ea typeface="+mn-ea"/>
+                <a:cs typeface="+mn-cs"/>
+              </a:defRPr>
+            </a:lvl5pPr>
+            <a:lvl6pPr marL="2514600" indent="-228600" algn="l" defTabSz="914400" rtl="0" eaLnBrk="1" latinLnBrk="0" hangingPunct="1">
+              <a:lnSpc>
+                <a:spcPct val="90000"/>
+              </a:lnSpc>
+              <a:spcBef>
+                <a:spcPts val="500"/>
+              </a:spcBef>
+              <a:buFont typeface="Arial" panose="020B0604020202020204" pitchFamily="34" charset="0"/>
+              <a:buChar char="•"/>
+              <a:defRPr sz="1800" kern="1200">
+                <a:solidFill>
+                  <a:schemeClr val="tx1"/>
+                </a:solidFill>
+                <a:latin typeface="+mn-lt"/>
+                <a:ea typeface="+mn-ea"/>
+                <a:cs typeface="+mn-cs"/>
+              </a:defRPr>
+            </a:lvl6pPr>
+            <a:lvl7pPr marL="2971800" indent="-228600" algn="l" defTabSz="914400" rtl="0" eaLnBrk="1" latinLnBrk="0" hangingPunct="1">
+              <a:lnSpc>
+                <a:spcPct val="90000"/>
+              </a:lnSpc>
+              <a:spcBef>
+                <a:spcPts val="500"/>
+              </a:spcBef>
+              <a:buFont typeface="Arial" panose="020B0604020202020204" pitchFamily="34" charset="0"/>
+              <a:buChar char="•"/>
+              <a:defRPr sz="1800" kern="1200">
+                <a:solidFill>
+                  <a:schemeClr val="tx1"/>
+                </a:solidFill>
+                <a:latin typeface="+mn-lt"/>
+                <a:ea typeface="+mn-ea"/>
+                <a:cs typeface="+mn-cs"/>
+              </a:defRPr>
+            </a:lvl7pPr>
+            <a:lvl8pPr marL="3429000" indent="-228600" algn="l" defTabSz="914400" rtl="0" eaLnBrk="1" latinLnBrk="0" hangingPunct="1">
+              <a:lnSpc>
+                <a:spcPct val="90000"/>
+              </a:lnSpc>
+              <a:spcBef>
+                <a:spcPts val="500"/>
+              </a:spcBef>
+              <a:buFont typeface="Arial" panose="020B0604020202020204" pitchFamily="34" charset="0"/>
+              <a:buChar char="•"/>
+              <a:defRPr sz="1800" kern="1200">
+                <a:solidFill>
+                  <a:schemeClr val="tx1"/>
+                </a:solidFill>
+                <a:latin typeface="+mn-lt"/>
+                <a:ea typeface="+mn-ea"/>
+                <a:cs typeface="+mn-cs"/>
+              </a:defRPr>
+            </a:lvl8pPr>
+            <a:lvl9pPr marL="3886200" indent="-228600" algn="l" defTabSz="914400" rtl="0" eaLnBrk="1" latinLnBrk="0" hangingPunct="1">
+              <a:lnSpc>
+                <a:spcPct val="90000"/>
+              </a:lnSpc>
+              <a:spcBef>
+                <a:spcPts val="500"/>
+              </a:spcBef>
+              <a:buFont typeface="Arial" panose="020B0604020202020204" pitchFamily="34" charset="0"/>
+              <a:buChar char="•"/>
+              <a:defRPr sz="1800" kern="1200">
+                <a:solidFill>
+                  <a:schemeClr val="tx1"/>
+                </a:solidFill>
+                <a:latin typeface="+mn-lt"/>
+                <a:ea typeface="+mn-ea"/>
+                <a:cs typeface="+mn-cs"/>
+              </a:defRPr>
+            </a:lvl9pPr>
+          </a:lstStyle>
+          <a:p>
+            <a:r>
+              <a:rPr lang="ru-RU" sz="1400" dirty="0"/>
+              <a:t>Веб-сервисы и источники данных</a:t>
+            </a:r>
+            <a:br>
+              <a:rPr lang="ru-RU" sz="1400" dirty="0"/>
+            </a:br>
+            <a:r>
+              <a:rPr lang="ru-RU" sz="1400" dirty="0"/>
+              <a:t>1с Предприятие, фреймворк</a:t>
+            </a:r>
+            <a:r>
+              <a:rPr lang="en-US" sz="1400" dirty="0"/>
+              <a:t> </a:t>
+            </a:r>
+            <a:r>
+              <a:rPr lang="en-US" sz="1400" dirty="0" err="1"/>
+              <a:t>FastAPI</a:t>
+            </a:r>
+            <a:endParaRPr lang="ru-RU" sz="1400" dirty="0"/>
+          </a:p>
+        </p:txBody>
+      </p:sp>
+      <p:sp>
+        <p:nvSpPr>
+          <p:cNvPr id="17" name="Текст 4">
+            <a:extLst>
+              <a:ext uri="{FF2B5EF4-FFF2-40B4-BE49-F238E27FC236}">
+                <a16:creationId xmlns:a16="http://schemas.microsoft.com/office/drawing/2014/main" id="{C148523C-A82B-97A5-90CC-DB370013F8DA}"/>
+              </a:ext>
+            </a:extLst>
+          </p:cNvPr>
+          <p:cNvSpPr txBox="1">
+            <a:spLocks/>
+          </p:cNvSpPr>
+          <p:nvPr/>
+        </p:nvSpPr>
+        <p:spPr>
+          <a:xfrm>
+            <a:off x="1143689" y="4203440"/>
+            <a:ext cx="3586931" cy="537011"/>
+          </a:xfrm>
+          <a:prstGeom prst="rect">
+            <a:avLst/>
+          </a:prstGeom>
+        </p:spPr>
+        <p:txBody>
+          <a:bodyPr vert="horz" lIns="0" tIns="0" rIns="0" bIns="0" rtlCol="0">
+            <a:noAutofit/>
+          </a:bodyPr>
+          <a:lstStyle>
+            <a:lvl1pPr marL="0" indent="0" algn="l" defTabSz="914400" rtl="0" eaLnBrk="1" latinLnBrk="0" hangingPunct="1">
+              <a:lnSpc>
+                <a:spcPct val="90000"/>
+              </a:lnSpc>
+              <a:spcBef>
+                <a:spcPts val="1000"/>
+              </a:spcBef>
+              <a:buFont typeface="Arial" panose="020B0604020202020204" pitchFamily="34" charset="0"/>
+              <a:buNone/>
+              <a:defRPr sz="1600" b="0" i="0" kern="1200">
+                <a:solidFill>
+                  <a:srgbClr val="0E2D69"/>
+                </a:solidFill>
+                <a:latin typeface="HSE Sans" panose="02000000000000000000" pitchFamily="2" charset="0"/>
+                <a:ea typeface="+mn-ea"/>
+                <a:cs typeface="+mn-cs"/>
+              </a:defRPr>
+            </a:lvl1pPr>
+            <a:lvl2pPr marL="685800" indent="-228600" algn="l" defTabSz="914400" rtl="0" eaLnBrk="1" latinLnBrk="0" hangingPunct="1">
+              <a:lnSpc>
+                <a:spcPct val="90000"/>
+              </a:lnSpc>
+              <a:spcBef>
+                <a:spcPts val="500"/>
+              </a:spcBef>
+              <a:buFont typeface="Arial" panose="020B0604020202020204" pitchFamily="34" charset="0"/>
+              <a:buChar char="•"/>
+              <a:defRPr sz="1600" b="0" i="0" kern="1200">
+                <a:solidFill>
+                  <a:srgbClr val="0E2D69"/>
+                </a:solidFill>
+                <a:latin typeface="HSE Sans" panose="02000000000000000000" pitchFamily="2" charset="0"/>
+                <a:ea typeface="+mn-ea"/>
+                <a:cs typeface="+mn-cs"/>
+              </a:defRPr>
+            </a:lvl2pPr>
+            <a:lvl3pPr marL="1143000" indent="-228600" algn="l" defTabSz="914400" rtl="0" eaLnBrk="1" latinLnBrk="0" hangingPunct="1">
+              <a:lnSpc>
+                <a:spcPct val="90000"/>
+              </a:lnSpc>
+              <a:spcBef>
+                <a:spcPts val="500"/>
+              </a:spcBef>
+              <a:buFont typeface="Arial" panose="020B0604020202020204" pitchFamily="34" charset="0"/>
+              <a:buChar char="•"/>
+              <a:defRPr sz="1600" b="0" i="0" kern="1200">
+                <a:solidFill>
+                  <a:srgbClr val="0E2D69"/>
+                </a:solidFill>
+                <a:latin typeface="HSE Sans" panose="02000000000000000000" pitchFamily="2" charset="0"/>
+                <a:ea typeface="+mn-ea"/>
+                <a:cs typeface="+mn-cs"/>
+              </a:defRPr>
+            </a:lvl3pPr>
+            <a:lvl4pPr marL="1600200" indent="-228600" algn="l" defTabSz="914400" rtl="0" eaLnBrk="1" latinLnBrk="0" hangingPunct="1">
+              <a:lnSpc>
+                <a:spcPct val="90000"/>
+              </a:lnSpc>
+              <a:spcBef>
+                <a:spcPts val="500"/>
+              </a:spcBef>
+              <a:buFont typeface="Arial" panose="020B0604020202020204" pitchFamily="34" charset="0"/>
+              <a:buChar char="•"/>
+              <a:defRPr sz="1600" b="0" i="0" kern="1200">
+                <a:solidFill>
+                  <a:srgbClr val="0E2D69"/>
+                </a:solidFill>
+                <a:latin typeface="HSE Sans" panose="02000000000000000000" pitchFamily="2" charset="0"/>
+                <a:ea typeface="+mn-ea"/>
+                <a:cs typeface="+mn-cs"/>
+              </a:defRPr>
+            </a:lvl4pPr>
+            <a:lvl5pPr marL="2057400" indent="-228600" algn="l" defTabSz="914400" rtl="0" eaLnBrk="1" latinLnBrk="0" hangingPunct="1">
+              <a:lnSpc>
+                <a:spcPct val="90000"/>
+              </a:lnSpc>
+              <a:spcBef>
+                <a:spcPts val="500"/>
+              </a:spcBef>
+              <a:buFont typeface="Arial" panose="020B0604020202020204" pitchFamily="34" charset="0"/>
+              <a:buChar char="•"/>
+              <a:defRPr sz="1600" b="0" i="0" kern="1200">
+                <a:solidFill>
+                  <a:srgbClr val="0E2D69"/>
+                </a:solidFill>
+                <a:latin typeface="HSE Sans" panose="02000000000000000000" pitchFamily="2" charset="0"/>
+                <a:ea typeface="+mn-ea"/>
+                <a:cs typeface="+mn-cs"/>
+              </a:defRPr>
+            </a:lvl5pPr>
+            <a:lvl6pPr marL="2514600" indent="-228600" algn="l" defTabSz="914400" rtl="0" eaLnBrk="1" latinLnBrk="0" hangingPunct="1">
+              <a:lnSpc>
+                <a:spcPct val="90000"/>
+              </a:lnSpc>
+              <a:spcBef>
+                <a:spcPts val="500"/>
+              </a:spcBef>
+              <a:buFont typeface="Arial" panose="020B0604020202020204" pitchFamily="34" charset="0"/>
+              <a:buChar char="•"/>
+              <a:defRPr sz="1800" kern="1200">
+                <a:solidFill>
+                  <a:schemeClr val="tx1"/>
+                </a:solidFill>
+                <a:latin typeface="+mn-lt"/>
+                <a:ea typeface="+mn-ea"/>
+                <a:cs typeface="+mn-cs"/>
+              </a:defRPr>
+            </a:lvl6pPr>
+            <a:lvl7pPr marL="2971800" indent="-228600" algn="l" defTabSz="914400" rtl="0" eaLnBrk="1" latinLnBrk="0" hangingPunct="1">
+              <a:lnSpc>
+                <a:spcPct val="90000"/>
+              </a:lnSpc>
+              <a:spcBef>
+                <a:spcPts val="500"/>
+              </a:spcBef>
+              <a:buFont typeface="Arial" panose="020B0604020202020204" pitchFamily="34" charset="0"/>
+              <a:buChar char="•"/>
+              <a:defRPr sz="1800" kern="1200">
+                <a:solidFill>
+                  <a:schemeClr val="tx1"/>
+                </a:solidFill>
+                <a:latin typeface="+mn-lt"/>
+                <a:ea typeface="+mn-ea"/>
+                <a:cs typeface="+mn-cs"/>
+              </a:defRPr>
+            </a:lvl7pPr>
+            <a:lvl8pPr marL="3429000" indent="-228600" algn="l" defTabSz="914400" rtl="0" eaLnBrk="1" latinLnBrk="0" hangingPunct="1">
+              <a:lnSpc>
+                <a:spcPct val="90000"/>
+              </a:lnSpc>
+              <a:spcBef>
+                <a:spcPts val="500"/>
+              </a:spcBef>
+              <a:buFont typeface="Arial" panose="020B0604020202020204" pitchFamily="34" charset="0"/>
+              <a:buChar char="•"/>
+              <a:defRPr sz="1800" kern="1200">
+                <a:solidFill>
+                  <a:schemeClr val="tx1"/>
+                </a:solidFill>
+                <a:latin typeface="+mn-lt"/>
+                <a:ea typeface="+mn-ea"/>
+                <a:cs typeface="+mn-cs"/>
+              </a:defRPr>
+            </a:lvl8pPr>
+            <a:lvl9pPr marL="3886200" indent="-228600" algn="l" defTabSz="914400" rtl="0" eaLnBrk="1" latinLnBrk="0" hangingPunct="1">
+              <a:lnSpc>
+                <a:spcPct val="90000"/>
+              </a:lnSpc>
+              <a:spcBef>
+                <a:spcPts val="500"/>
+              </a:spcBef>
+              <a:buFont typeface="Arial" panose="020B0604020202020204" pitchFamily="34" charset="0"/>
+              <a:buChar char="•"/>
+              <a:defRPr sz="1800" kern="1200">
+                <a:solidFill>
+                  <a:schemeClr val="tx1"/>
+                </a:solidFill>
+                <a:latin typeface="+mn-lt"/>
+                <a:ea typeface="+mn-ea"/>
+                <a:cs typeface="+mn-cs"/>
+              </a:defRPr>
+            </a:lvl9pPr>
+          </a:lstStyle>
+          <a:p>
+            <a:r>
+              <a:rPr lang="ru-RU" sz="1400" dirty="0"/>
+              <a:t>Платформа</a:t>
+            </a:r>
+            <a:r>
+              <a:rPr lang="en-US" sz="1400" dirty="0"/>
+              <a:t> </a:t>
+            </a:r>
+            <a:r>
+              <a:rPr lang="en-US" sz="1400" dirty="0" err="1"/>
+              <a:t>MLfow</a:t>
+            </a:r>
+            <a:endParaRPr lang="ru-RU" sz="1400" dirty="0"/>
+          </a:p>
+        </p:txBody>
+      </p:sp>
+      <p:sp>
+        <p:nvSpPr>
+          <p:cNvPr id="18" name="Текст 4">
+            <a:extLst>
+              <a:ext uri="{FF2B5EF4-FFF2-40B4-BE49-F238E27FC236}">
+                <a16:creationId xmlns:a16="http://schemas.microsoft.com/office/drawing/2014/main" id="{64F22D9A-B368-AB99-107C-4564536CC41D}"/>
+              </a:ext>
+            </a:extLst>
+          </p:cNvPr>
+          <p:cNvSpPr txBox="1">
+            <a:spLocks/>
+          </p:cNvSpPr>
+          <p:nvPr/>
+        </p:nvSpPr>
+        <p:spPr>
+          <a:xfrm>
+            <a:off x="5616625" y="4216417"/>
+            <a:ext cx="3586931" cy="537011"/>
+          </a:xfrm>
+          <a:prstGeom prst="rect">
+            <a:avLst/>
+          </a:prstGeom>
+        </p:spPr>
+        <p:txBody>
+          <a:bodyPr vert="horz" lIns="0" tIns="0" rIns="0" bIns="0" rtlCol="0">
+            <a:noAutofit/>
+          </a:bodyPr>
+          <a:lstStyle>
+            <a:lvl1pPr marL="0" indent="0" algn="l" defTabSz="914400" rtl="0" eaLnBrk="1" latinLnBrk="0" hangingPunct="1">
+              <a:lnSpc>
+                <a:spcPct val="90000"/>
+              </a:lnSpc>
+              <a:spcBef>
+                <a:spcPts val="1000"/>
+              </a:spcBef>
+              <a:buFont typeface="Arial" panose="020B0604020202020204" pitchFamily="34" charset="0"/>
+              <a:buNone/>
+              <a:defRPr sz="1600" b="0" i="0" kern="1200">
+                <a:solidFill>
+                  <a:srgbClr val="0E2D69"/>
+                </a:solidFill>
+                <a:latin typeface="HSE Sans" panose="02000000000000000000" pitchFamily="2" charset="0"/>
+                <a:ea typeface="+mn-ea"/>
+                <a:cs typeface="+mn-cs"/>
+              </a:defRPr>
+            </a:lvl1pPr>
+            <a:lvl2pPr marL="685800" indent="-228600" algn="l" defTabSz="914400" rtl="0" eaLnBrk="1" latinLnBrk="0" hangingPunct="1">
+              <a:lnSpc>
+                <a:spcPct val="90000"/>
+              </a:lnSpc>
+              <a:spcBef>
+                <a:spcPts val="500"/>
+              </a:spcBef>
+              <a:buFont typeface="Arial" panose="020B0604020202020204" pitchFamily="34" charset="0"/>
+              <a:buChar char="•"/>
+              <a:defRPr sz="1600" b="0" i="0" kern="1200">
+                <a:solidFill>
+                  <a:srgbClr val="0E2D69"/>
+                </a:solidFill>
+                <a:latin typeface="HSE Sans" panose="02000000000000000000" pitchFamily="2" charset="0"/>
+                <a:ea typeface="+mn-ea"/>
+                <a:cs typeface="+mn-cs"/>
+              </a:defRPr>
+            </a:lvl2pPr>
+            <a:lvl3pPr marL="1143000" indent="-228600" algn="l" defTabSz="914400" rtl="0" eaLnBrk="1" latinLnBrk="0" hangingPunct="1">
+              <a:lnSpc>
+                <a:spcPct val="90000"/>
+              </a:lnSpc>
+              <a:spcBef>
+                <a:spcPts val="500"/>
+              </a:spcBef>
+              <a:buFont typeface="Arial" panose="020B0604020202020204" pitchFamily="34" charset="0"/>
+              <a:buChar char="•"/>
+              <a:defRPr sz="1600" b="0" i="0" kern="1200">
+                <a:solidFill>
+                  <a:srgbClr val="0E2D69"/>
+                </a:solidFill>
+                <a:latin typeface="HSE Sans" panose="02000000000000000000" pitchFamily="2" charset="0"/>
+                <a:ea typeface="+mn-ea"/>
+                <a:cs typeface="+mn-cs"/>
+              </a:defRPr>
+            </a:lvl3pPr>
+            <a:lvl4pPr marL="1600200" indent="-228600" algn="l" defTabSz="914400" rtl="0" eaLnBrk="1" latinLnBrk="0" hangingPunct="1">
+              <a:lnSpc>
+                <a:spcPct val="90000"/>
+              </a:lnSpc>
+              <a:spcBef>
+                <a:spcPts val="500"/>
+              </a:spcBef>
+              <a:buFont typeface="Arial" panose="020B0604020202020204" pitchFamily="34" charset="0"/>
+              <a:buChar char="•"/>
+              <a:defRPr sz="1600" b="0" i="0" kern="1200">
+                <a:solidFill>
+                  <a:srgbClr val="0E2D69"/>
+                </a:solidFill>
+                <a:latin typeface="HSE Sans" panose="02000000000000000000" pitchFamily="2" charset="0"/>
+                <a:ea typeface="+mn-ea"/>
+                <a:cs typeface="+mn-cs"/>
+              </a:defRPr>
+            </a:lvl4pPr>
+            <a:lvl5pPr marL="2057400" indent="-228600" algn="l" defTabSz="914400" rtl="0" eaLnBrk="1" latinLnBrk="0" hangingPunct="1">
+              <a:lnSpc>
+                <a:spcPct val="90000"/>
+              </a:lnSpc>
+              <a:spcBef>
+                <a:spcPts val="500"/>
+              </a:spcBef>
+              <a:buFont typeface="Arial" panose="020B0604020202020204" pitchFamily="34" charset="0"/>
+              <a:buChar char="•"/>
+              <a:defRPr sz="1600" b="0" i="0" kern="1200">
+                <a:solidFill>
+                  <a:srgbClr val="0E2D69"/>
+                </a:solidFill>
+                <a:latin typeface="HSE Sans" panose="02000000000000000000" pitchFamily="2" charset="0"/>
+                <a:ea typeface="+mn-ea"/>
+                <a:cs typeface="+mn-cs"/>
+              </a:defRPr>
+            </a:lvl5pPr>
+            <a:lvl6pPr marL="2514600" indent="-228600" algn="l" defTabSz="914400" rtl="0" eaLnBrk="1" latinLnBrk="0" hangingPunct="1">
+              <a:lnSpc>
+                <a:spcPct val="90000"/>
+              </a:lnSpc>
+              <a:spcBef>
+                <a:spcPts val="500"/>
+              </a:spcBef>
+              <a:buFont typeface="Arial" panose="020B0604020202020204" pitchFamily="34" charset="0"/>
+              <a:buChar char="•"/>
+              <a:defRPr sz="1800" kern="1200">
+                <a:solidFill>
+                  <a:schemeClr val="tx1"/>
+                </a:solidFill>
+                <a:latin typeface="+mn-lt"/>
+                <a:ea typeface="+mn-ea"/>
+                <a:cs typeface="+mn-cs"/>
+              </a:defRPr>
+            </a:lvl6pPr>
+            <a:lvl7pPr marL="2971800" indent="-228600" algn="l" defTabSz="914400" rtl="0" eaLnBrk="1" latinLnBrk="0" hangingPunct="1">
+              <a:lnSpc>
+                <a:spcPct val="90000"/>
+              </a:lnSpc>
+              <a:spcBef>
+                <a:spcPts val="500"/>
+              </a:spcBef>
+              <a:buFont typeface="Arial" panose="020B0604020202020204" pitchFamily="34" charset="0"/>
+              <a:buChar char="•"/>
+              <a:defRPr sz="1800" kern="1200">
+                <a:solidFill>
+                  <a:schemeClr val="tx1"/>
+                </a:solidFill>
+                <a:latin typeface="+mn-lt"/>
+                <a:ea typeface="+mn-ea"/>
+                <a:cs typeface="+mn-cs"/>
+              </a:defRPr>
+            </a:lvl7pPr>
+            <a:lvl8pPr marL="3429000" indent="-228600" algn="l" defTabSz="914400" rtl="0" eaLnBrk="1" latinLnBrk="0" hangingPunct="1">
+              <a:lnSpc>
+                <a:spcPct val="90000"/>
+              </a:lnSpc>
+              <a:spcBef>
+                <a:spcPts val="500"/>
+              </a:spcBef>
+              <a:buFont typeface="Arial" panose="020B0604020202020204" pitchFamily="34" charset="0"/>
+              <a:buChar char="•"/>
+              <a:defRPr sz="1800" kern="1200">
+                <a:solidFill>
+                  <a:schemeClr val="tx1"/>
+                </a:solidFill>
+                <a:latin typeface="+mn-lt"/>
+                <a:ea typeface="+mn-ea"/>
+                <a:cs typeface="+mn-cs"/>
+              </a:defRPr>
+            </a:lvl8pPr>
+            <a:lvl9pPr marL="3886200" indent="-228600" algn="l" defTabSz="914400" rtl="0" eaLnBrk="1" latinLnBrk="0" hangingPunct="1">
+              <a:lnSpc>
+                <a:spcPct val="90000"/>
+              </a:lnSpc>
+              <a:spcBef>
+                <a:spcPts val="500"/>
+              </a:spcBef>
+              <a:buFont typeface="Arial" panose="020B0604020202020204" pitchFamily="34" charset="0"/>
+              <a:buChar char="•"/>
+              <a:defRPr sz="1800" kern="1200">
+                <a:solidFill>
+                  <a:schemeClr val="tx1"/>
+                </a:solidFill>
+                <a:latin typeface="+mn-lt"/>
+                <a:ea typeface="+mn-ea"/>
+                <a:cs typeface="+mn-cs"/>
+              </a:defRPr>
+            </a:lvl9pPr>
+          </a:lstStyle>
+          <a:p>
+            <a:r>
+              <a:rPr lang="ru-RU" sz="1400" dirty="0"/>
+              <a:t>Платформа</a:t>
+            </a:r>
+            <a:r>
+              <a:rPr lang="en-US" sz="1400" dirty="0"/>
+              <a:t> Airflow</a:t>
+            </a:r>
+            <a:endParaRPr lang="ru-RU" sz="1400" dirty="0"/>
+          </a:p>
+        </p:txBody>
+      </p:sp>
+      <p:sp>
+        <p:nvSpPr>
+          <p:cNvPr id="19" name="Текст 4">
+            <a:extLst>
+              <a:ext uri="{FF2B5EF4-FFF2-40B4-BE49-F238E27FC236}">
+                <a16:creationId xmlns:a16="http://schemas.microsoft.com/office/drawing/2014/main" id="{85496A9A-C296-E51B-843A-3DAB71719BFB}"/>
+              </a:ext>
+            </a:extLst>
+          </p:cNvPr>
+          <p:cNvSpPr txBox="1">
+            <a:spLocks/>
+          </p:cNvSpPr>
+          <p:nvPr/>
+        </p:nvSpPr>
+        <p:spPr>
+          <a:xfrm>
+            <a:off x="9206037" y="1984075"/>
+            <a:ext cx="2820404" cy="483250"/>
+          </a:xfrm>
+          <a:prstGeom prst="rect">
+            <a:avLst/>
+          </a:prstGeom>
+        </p:spPr>
+        <p:txBody>
+          <a:bodyPr vert="horz" lIns="0" tIns="0" rIns="0" bIns="0" rtlCol="0">
+            <a:noAutofit/>
+          </a:bodyPr>
+          <a:lstStyle>
+            <a:lvl1pPr marL="0" indent="0" algn="l" defTabSz="914400" rtl="0" eaLnBrk="1" latinLnBrk="0" hangingPunct="1">
+              <a:lnSpc>
+                <a:spcPct val="90000"/>
+              </a:lnSpc>
+              <a:spcBef>
+                <a:spcPts val="1000"/>
+              </a:spcBef>
+              <a:buFont typeface="Arial" panose="020B0604020202020204" pitchFamily="34" charset="0"/>
+              <a:buNone/>
+              <a:defRPr sz="1600" b="0" i="0" kern="1200">
+                <a:solidFill>
+                  <a:srgbClr val="0E2D69"/>
+                </a:solidFill>
+                <a:latin typeface="HSE Sans" panose="02000000000000000000" pitchFamily="2" charset="0"/>
+                <a:ea typeface="+mn-ea"/>
+                <a:cs typeface="+mn-cs"/>
+              </a:defRPr>
+            </a:lvl1pPr>
+            <a:lvl2pPr marL="685800" indent="-228600" algn="l" defTabSz="914400" rtl="0" eaLnBrk="1" latinLnBrk="0" hangingPunct="1">
+              <a:lnSpc>
+                <a:spcPct val="90000"/>
+              </a:lnSpc>
+              <a:spcBef>
+                <a:spcPts val="500"/>
+              </a:spcBef>
+              <a:buFont typeface="Arial" panose="020B0604020202020204" pitchFamily="34" charset="0"/>
+              <a:buChar char="•"/>
+              <a:defRPr sz="1600" b="0" i="0" kern="1200">
+                <a:solidFill>
+                  <a:srgbClr val="0E2D69"/>
+                </a:solidFill>
+                <a:latin typeface="HSE Sans" panose="02000000000000000000" pitchFamily="2" charset="0"/>
+                <a:ea typeface="+mn-ea"/>
+                <a:cs typeface="+mn-cs"/>
+              </a:defRPr>
+            </a:lvl2pPr>
+            <a:lvl3pPr marL="1143000" indent="-228600" algn="l" defTabSz="914400" rtl="0" eaLnBrk="1" latinLnBrk="0" hangingPunct="1">
+              <a:lnSpc>
+                <a:spcPct val="90000"/>
+              </a:lnSpc>
+              <a:spcBef>
+                <a:spcPts val="500"/>
+              </a:spcBef>
+              <a:buFont typeface="Arial" panose="020B0604020202020204" pitchFamily="34" charset="0"/>
+              <a:buChar char="•"/>
+              <a:defRPr sz="1600" b="0" i="0" kern="1200">
+                <a:solidFill>
+                  <a:srgbClr val="0E2D69"/>
+                </a:solidFill>
+                <a:latin typeface="HSE Sans" panose="02000000000000000000" pitchFamily="2" charset="0"/>
+                <a:ea typeface="+mn-ea"/>
+                <a:cs typeface="+mn-cs"/>
+              </a:defRPr>
+            </a:lvl3pPr>
+            <a:lvl4pPr marL="1600200" indent="-228600" algn="l" defTabSz="914400" rtl="0" eaLnBrk="1" latinLnBrk="0" hangingPunct="1">
+              <a:lnSpc>
+                <a:spcPct val="90000"/>
+              </a:lnSpc>
+              <a:spcBef>
+                <a:spcPts val="500"/>
+              </a:spcBef>
+              <a:buFont typeface="Arial" panose="020B0604020202020204" pitchFamily="34" charset="0"/>
+              <a:buChar char="•"/>
+              <a:defRPr sz="1600" b="0" i="0" kern="1200">
+                <a:solidFill>
+                  <a:srgbClr val="0E2D69"/>
+                </a:solidFill>
+                <a:latin typeface="HSE Sans" panose="02000000000000000000" pitchFamily="2" charset="0"/>
+                <a:ea typeface="+mn-ea"/>
+                <a:cs typeface="+mn-cs"/>
+              </a:defRPr>
+            </a:lvl4pPr>
+            <a:lvl5pPr marL="2057400" indent="-228600" algn="l" defTabSz="914400" rtl="0" eaLnBrk="1" latinLnBrk="0" hangingPunct="1">
+              <a:lnSpc>
+                <a:spcPct val="90000"/>
+              </a:lnSpc>
+              <a:spcBef>
+                <a:spcPts val="500"/>
+              </a:spcBef>
+              <a:buFont typeface="Arial" panose="020B0604020202020204" pitchFamily="34" charset="0"/>
+              <a:buChar char="•"/>
+              <a:defRPr sz="1600" b="0" i="0" kern="1200">
+                <a:solidFill>
+                  <a:srgbClr val="0E2D69"/>
+                </a:solidFill>
+                <a:latin typeface="HSE Sans" panose="02000000000000000000" pitchFamily="2" charset="0"/>
+                <a:ea typeface="+mn-ea"/>
+                <a:cs typeface="+mn-cs"/>
+              </a:defRPr>
+            </a:lvl5pPr>
+            <a:lvl6pPr marL="2514600" indent="-228600" algn="l" defTabSz="914400" rtl="0" eaLnBrk="1" latinLnBrk="0" hangingPunct="1">
+              <a:lnSpc>
+                <a:spcPct val="90000"/>
+              </a:lnSpc>
+              <a:spcBef>
+                <a:spcPts val="500"/>
+              </a:spcBef>
+              <a:buFont typeface="Arial" panose="020B0604020202020204" pitchFamily="34" charset="0"/>
+              <a:buChar char="•"/>
+              <a:defRPr sz="1800" kern="1200">
+                <a:solidFill>
+                  <a:schemeClr val="tx1"/>
+                </a:solidFill>
+                <a:latin typeface="+mn-lt"/>
+                <a:ea typeface="+mn-ea"/>
+                <a:cs typeface="+mn-cs"/>
+              </a:defRPr>
+            </a:lvl6pPr>
+            <a:lvl7pPr marL="2971800" indent="-228600" algn="l" defTabSz="914400" rtl="0" eaLnBrk="1" latinLnBrk="0" hangingPunct="1">
+              <a:lnSpc>
+                <a:spcPct val="90000"/>
+              </a:lnSpc>
+              <a:spcBef>
+                <a:spcPts val="500"/>
+              </a:spcBef>
+              <a:buFont typeface="Arial" panose="020B0604020202020204" pitchFamily="34" charset="0"/>
+              <a:buChar char="•"/>
+              <a:defRPr sz="1800" kern="1200">
+                <a:solidFill>
+                  <a:schemeClr val="tx1"/>
+                </a:solidFill>
+                <a:latin typeface="+mn-lt"/>
+                <a:ea typeface="+mn-ea"/>
+                <a:cs typeface="+mn-cs"/>
+              </a:defRPr>
+            </a:lvl7pPr>
+            <a:lvl8pPr marL="3429000" indent="-228600" algn="l" defTabSz="914400" rtl="0" eaLnBrk="1" latinLnBrk="0" hangingPunct="1">
+              <a:lnSpc>
+                <a:spcPct val="90000"/>
+              </a:lnSpc>
+              <a:spcBef>
+                <a:spcPts val="500"/>
+              </a:spcBef>
+              <a:buFont typeface="Arial" panose="020B0604020202020204" pitchFamily="34" charset="0"/>
+              <a:buChar char="•"/>
+              <a:defRPr sz="1800" kern="1200">
+                <a:solidFill>
+                  <a:schemeClr val="tx1"/>
+                </a:solidFill>
+                <a:latin typeface="+mn-lt"/>
+                <a:ea typeface="+mn-ea"/>
+                <a:cs typeface="+mn-cs"/>
+              </a:defRPr>
+            </a:lvl8pPr>
+            <a:lvl9pPr marL="3886200" indent="-228600" algn="l" defTabSz="914400" rtl="0" eaLnBrk="1" latinLnBrk="0" hangingPunct="1">
+              <a:lnSpc>
+                <a:spcPct val="90000"/>
+              </a:lnSpc>
+              <a:spcBef>
+                <a:spcPts val="500"/>
+              </a:spcBef>
+              <a:buFont typeface="Arial" panose="020B0604020202020204" pitchFamily="34" charset="0"/>
+              <a:buChar char="•"/>
+              <a:defRPr sz="1800" kern="1200">
+                <a:solidFill>
+                  <a:schemeClr val="tx1"/>
+                </a:solidFill>
+                <a:latin typeface="+mn-lt"/>
+                <a:ea typeface="+mn-ea"/>
+                <a:cs typeface="+mn-cs"/>
+              </a:defRPr>
+            </a:lvl9pPr>
+          </a:lstStyle>
+          <a:p>
+            <a:r>
+              <a:rPr lang="ru-RU" sz="1400" dirty="0"/>
+              <a:t>Платформа</a:t>
+            </a:r>
+            <a:r>
+              <a:rPr lang="en-US" sz="1400" dirty="0"/>
+              <a:t> Kibana</a:t>
+            </a:r>
+            <a:endParaRPr lang="ru-RU" sz="1400" dirty="0"/>
+          </a:p>
+        </p:txBody>
+      </p:sp>
+    </p:spTree>
+    <p:extLst>
+      <p:ext uri="{BB962C8B-B14F-4D97-AF65-F5344CB8AC3E}">
+        <p14:creationId xmlns:p14="http://schemas.microsoft.com/office/powerpoint/2010/main" val="2914888342"/>
+      </p:ext>
+    </p:extLst>
+  </p:cSld>
+  <p:clrMapOvr>
+    <a:masterClrMapping/>
+  </p:clrMapOvr>
+</p:sld>
+</file>
+
+<file path=ppt/slides/slide17.xml><?xml version="1.0" encoding="utf-8"?>
+<p:sld xmlns:a="http://schemas.openxmlformats.org/drawingml/2006/main" xmlns:r="http://schemas.openxmlformats.org/officeDocument/2006/relationships" xmlns:p="http://schemas.openxmlformats.org/presentationml/2006/main">
+  <p:cSld>
+    <p:spTree>
+      <p:nvGrpSpPr>
         <p:cNvPr id="1" name=""/>
         <p:cNvGrpSpPr/>
         <p:nvPr/>
@@ -24428,7 +25622,7 @@
 </p:sld>
 </file>
 
-<file path=ppt/slides/slide17.xml><?xml version="1.0" encoding="utf-8"?>
+<file path=ppt/slides/slide18.xml><?xml version="1.0" encoding="utf-8"?>
 <p:sld xmlns:a="http://schemas.openxmlformats.org/drawingml/2006/main" xmlns:r="http://schemas.openxmlformats.org/officeDocument/2006/relationships" xmlns:p="http://schemas.openxmlformats.org/presentationml/2006/main">
   <p:cSld>
     <p:spTree>
@@ -24682,268 +25876,6 @@
     <p:extLst>
       <p:ext uri="{BB962C8B-B14F-4D97-AF65-F5344CB8AC3E}">
         <p14:creationId xmlns:p14="http://schemas.microsoft.com/office/powerpoint/2010/main" val="1135808085"/>
-      </p:ext>
-    </p:extLst>
-  </p:cSld>
-  <p:clrMapOvr>
-    <a:masterClrMapping/>
-  </p:clrMapOvr>
-</p:sld>
-</file>
-
-<file path=ppt/slides/slide18.xml><?xml version="1.0" encoding="utf-8"?>
-<p:sld xmlns:a="http://schemas.openxmlformats.org/drawingml/2006/main" xmlns:r="http://schemas.openxmlformats.org/officeDocument/2006/relationships" xmlns:p="http://schemas.openxmlformats.org/presentationml/2006/main">
-  <p:cSld>
-    <p:spTree>
-      <p:nvGrpSpPr>
-        <p:cNvPr id="1" name=""/>
-        <p:cNvGrpSpPr/>
-        <p:nvPr/>
-      </p:nvGrpSpPr>
-      <p:grpSpPr>
-        <a:xfrm>
-          <a:off x="0" y="0"/>
-          <a:ext cx="0" cy="0"/>
-          <a:chOff x="0" y="0"/>
-          <a:chExt cx="0" cy="0"/>
-        </a:xfrm>
-      </p:grpSpPr>
-      <p:sp>
-        <p:nvSpPr>
-          <p:cNvPr id="2" name="Текст 1">
-            <a:extLst>
-              <a:ext uri="{FF2B5EF4-FFF2-40B4-BE49-F238E27FC236}">
-                <a16:creationId xmlns:a16="http://schemas.microsoft.com/office/drawing/2014/main" id="{7AC8064E-5791-204C-B92F-A01827949435}"/>
-              </a:ext>
-            </a:extLst>
-          </p:cNvPr>
-          <p:cNvSpPr>
-            <a:spLocks noGrp="1"/>
-          </p:cNvSpPr>
-          <p:nvPr>
-            <p:ph type="body" sz="quarter" idx="13"/>
-          </p:nvPr>
-        </p:nvSpPr>
-        <p:spPr/>
-        <p:txBody>
-          <a:bodyPr/>
-          <a:lstStyle/>
-          <a:p>
-            <a:r>
-              <a:rPr lang="ru-RU" dirty="0"/>
-              <a:t>Магистратура</a:t>
-            </a:r>
-          </a:p>
-          <a:p>
-            <a:r>
-              <a:rPr lang="ru-RU" dirty="0"/>
-              <a:t>«Искусственный интеллект»</a:t>
-            </a:r>
-          </a:p>
-          <a:p>
-            <a:endParaRPr lang="ru-RU" dirty="0"/>
-          </a:p>
-          <a:p>
-            <a:endParaRPr lang="ru-RU" dirty="0"/>
-          </a:p>
-        </p:txBody>
-      </p:sp>
-      <p:sp>
-        <p:nvSpPr>
-          <p:cNvPr id="3" name="Текст 2">
-            <a:extLst>
-              <a:ext uri="{FF2B5EF4-FFF2-40B4-BE49-F238E27FC236}">
-                <a16:creationId xmlns:a16="http://schemas.microsoft.com/office/drawing/2014/main" id="{C5A111DD-C00C-2D48-9F7A-4E23C5BA0C63}"/>
-              </a:ext>
-            </a:extLst>
-          </p:cNvPr>
-          <p:cNvSpPr>
-            <a:spLocks noGrp="1"/>
-          </p:cNvSpPr>
-          <p:nvPr>
-            <p:ph type="body" sz="quarter" idx="14"/>
-          </p:nvPr>
-        </p:nvSpPr>
-        <p:spPr/>
-        <p:txBody>
-          <a:bodyPr/>
-          <a:lstStyle/>
-          <a:p>
-            <a:r>
-              <a:rPr lang="ru-RU" dirty="0"/>
-              <a:t>Планирование работы фрезерных станков с использованием ИИ</a:t>
-            </a:r>
-          </a:p>
-          <a:p>
-            <a:endParaRPr lang="ru-RU" dirty="0"/>
-          </a:p>
-          <a:p>
-            <a:endParaRPr lang="ru-RU" dirty="0"/>
-          </a:p>
-        </p:txBody>
-      </p:sp>
-      <p:sp>
-        <p:nvSpPr>
-          <p:cNvPr id="4" name="Текст 3">
-            <a:extLst>
-              <a:ext uri="{FF2B5EF4-FFF2-40B4-BE49-F238E27FC236}">
-                <a16:creationId xmlns:a16="http://schemas.microsoft.com/office/drawing/2014/main" id="{D7B3E517-ED8B-0241-AB87-BE49B315EEBF}"/>
-              </a:ext>
-            </a:extLst>
-          </p:cNvPr>
-          <p:cNvSpPr>
-            <a:spLocks noGrp="1"/>
-          </p:cNvSpPr>
-          <p:nvPr>
-            <p:ph type="body" sz="quarter" idx="15"/>
-          </p:nvPr>
-        </p:nvSpPr>
-        <p:spPr/>
-        <p:txBody>
-          <a:bodyPr/>
-          <a:lstStyle/>
-          <a:p>
-            <a:r>
-              <a:rPr lang="ru-RU" dirty="0"/>
-              <a:t>Выводы</a:t>
-            </a:r>
-          </a:p>
-        </p:txBody>
-      </p:sp>
-      <p:sp>
-        <p:nvSpPr>
-          <p:cNvPr id="5" name="TextBox 4">
-            <a:extLst>
-              <a:ext uri="{FF2B5EF4-FFF2-40B4-BE49-F238E27FC236}">
-                <a16:creationId xmlns:a16="http://schemas.microsoft.com/office/drawing/2014/main" id="{F76DA8C9-3BB0-531D-4BAA-D28E8DFB0D97}"/>
-              </a:ext>
-            </a:extLst>
-          </p:cNvPr>
-          <p:cNvSpPr txBox="1"/>
-          <p:nvPr/>
-        </p:nvSpPr>
-        <p:spPr>
-          <a:xfrm>
-            <a:off x="489975" y="1396903"/>
-            <a:ext cx="10132991" cy="461665"/>
-          </a:xfrm>
-          <a:prstGeom prst="rect">
-            <a:avLst/>
-          </a:prstGeom>
-          <a:noFill/>
-        </p:spPr>
-        <p:txBody>
-          <a:bodyPr wrap="square" rtlCol="0" anchor="t" anchorCtr="0">
-            <a:spAutoFit/>
-          </a:bodyPr>
-          <a:lstStyle/>
-          <a:p>
-            <a:r>
-              <a:rPr lang="ru-RU" sz="2400" dirty="0">
-                <a:solidFill>
-                  <a:srgbClr val="102D69"/>
-                </a:solidFill>
-                <a:latin typeface="HSE Sans" panose="02000000000000000000" pitchFamily="2" charset="0"/>
-              </a:rPr>
-              <a:t>Выводы</a:t>
-            </a:r>
-          </a:p>
-        </p:txBody>
-      </p:sp>
-      <p:sp>
-        <p:nvSpPr>
-          <p:cNvPr id="9" name="TextBox 8">
-            <a:extLst>
-              <a:ext uri="{FF2B5EF4-FFF2-40B4-BE49-F238E27FC236}">
-                <a16:creationId xmlns:a16="http://schemas.microsoft.com/office/drawing/2014/main" id="{9C2449C7-481F-A47D-FC18-4726A69B8E68}"/>
-              </a:ext>
-            </a:extLst>
-          </p:cNvPr>
-          <p:cNvSpPr txBox="1"/>
-          <p:nvPr/>
-        </p:nvSpPr>
-        <p:spPr>
-          <a:xfrm>
-            <a:off x="585897" y="2704251"/>
-            <a:ext cx="10472628" cy="2031325"/>
-          </a:xfrm>
-          <a:prstGeom prst="rect">
-            <a:avLst/>
-          </a:prstGeom>
-          <a:noFill/>
-        </p:spPr>
-        <p:txBody>
-          <a:bodyPr wrap="square">
-            <a:spAutoFit/>
-          </a:bodyPr>
-          <a:lstStyle/>
-          <a:p>
-            <a:r>
-              <a:rPr lang="ru-RU" dirty="0">
-                <a:solidFill>
-                  <a:srgbClr val="102D69"/>
-                </a:solidFill>
-              </a:rPr>
-              <a:t>Разработан мультимодальный комплекс, снижающий неопределенность планирования.</a:t>
-            </a:r>
-          </a:p>
-          <a:p>
-            <a:endParaRPr lang="ru-RU" dirty="0">
-              <a:solidFill>
-                <a:srgbClr val="102D69"/>
-              </a:solidFill>
-            </a:endParaRPr>
-          </a:p>
-          <a:p>
-            <a:r>
-              <a:rPr lang="ru-RU" dirty="0">
-                <a:solidFill>
-                  <a:srgbClr val="102D69"/>
-                </a:solidFill>
-              </a:rPr>
-              <a:t>Научная новизна подтверждена учетом реальной данных процесса через визуальный анализ.</a:t>
-            </a:r>
-          </a:p>
-          <a:p>
-            <a:endParaRPr lang="ru-RU" dirty="0">
-              <a:solidFill>
-                <a:srgbClr val="102D69"/>
-              </a:solidFill>
-            </a:endParaRPr>
-          </a:p>
-          <a:p>
-            <a:r>
-              <a:rPr lang="ru-RU" dirty="0">
-                <a:solidFill>
-                  <a:srgbClr val="102D69"/>
-                </a:solidFill>
-              </a:rPr>
-              <a:t>Положена основа к разработке методологии к обработке и хранению данных</a:t>
-            </a:r>
-          </a:p>
-          <a:p>
-            <a:endParaRPr lang="ru-RU" dirty="0">
-              <a:solidFill>
-                <a:srgbClr val="102D69"/>
-              </a:solidFill>
-            </a:endParaRPr>
-          </a:p>
-          <a:p>
-            <a:r>
-              <a:rPr lang="ru-RU" dirty="0">
-                <a:solidFill>
-                  <a:srgbClr val="102D69"/>
-                </a:solidFill>
-              </a:rPr>
-              <a:t>Система готова к масштабированию и может использоваться в промышленной эксплуатации</a:t>
-            </a:r>
-          </a:p>
-        </p:txBody>
-      </p:sp>
-    </p:spTree>
-    <p:extLst>
-      <p:ext uri="{BB962C8B-B14F-4D97-AF65-F5344CB8AC3E}">
-        <p14:creationId xmlns:p14="http://schemas.microsoft.com/office/powerpoint/2010/main" val="3576663970"/>
       </p:ext>
     </p:extLst>
   </p:cSld>
@@ -25042,17 +25974,82 @@
           <a:p>
             <a:endParaRPr lang="ru-RU" dirty="0"/>
           </a:p>
-          <a:p>
-            <a:endParaRPr lang="ru-RU" dirty="0"/>
-          </a:p>
         </p:txBody>
       </p:sp>
       <p:sp>
         <p:nvSpPr>
-          <p:cNvPr id="7" name="TextBox 6">
+          <p:cNvPr id="4" name="Текст 3">
             <a:extLst>
               <a:ext uri="{FF2B5EF4-FFF2-40B4-BE49-F238E27FC236}">
-                <a16:creationId xmlns:a16="http://schemas.microsoft.com/office/drawing/2014/main" id="{DFE8B687-BEA0-9194-E7C0-E7DB28F1FC51}"/>
+                <a16:creationId xmlns:a16="http://schemas.microsoft.com/office/drawing/2014/main" id="{D7B3E517-ED8B-0241-AB87-BE49B315EEBF}"/>
+              </a:ext>
+            </a:extLst>
+          </p:cNvPr>
+          <p:cNvSpPr>
+            <a:spLocks noGrp="1"/>
+          </p:cNvSpPr>
+          <p:nvPr>
+            <p:ph type="body" sz="quarter" idx="15"/>
+          </p:nvPr>
+        </p:nvSpPr>
+        <p:spPr/>
+        <p:txBody>
+          <a:bodyPr/>
+          <a:lstStyle/>
+          <a:p>
+            <a:r>
+              <a:rPr lang="ru-RU" dirty="0"/>
+              <a:t>Выводы</a:t>
+            </a:r>
+          </a:p>
+        </p:txBody>
+      </p:sp>
+      <p:sp>
+        <p:nvSpPr>
+          <p:cNvPr id="5" name="TextBox 4">
+            <a:extLst>
+              <a:ext uri="{FF2B5EF4-FFF2-40B4-BE49-F238E27FC236}">
+                <a16:creationId xmlns:a16="http://schemas.microsoft.com/office/drawing/2014/main" id="{F76DA8C9-3BB0-531D-4BAA-D28E8DFB0D97}"/>
+              </a:ext>
+            </a:extLst>
+          </p:cNvPr>
+          <p:cNvSpPr txBox="1"/>
+          <p:nvPr/>
+        </p:nvSpPr>
+        <p:spPr>
+          <a:xfrm>
+            <a:off x="489975" y="1396903"/>
+            <a:ext cx="10132991" cy="461665"/>
+          </a:xfrm>
+          <a:prstGeom prst="rect">
+            <a:avLst/>
+          </a:prstGeom>
+          <a:noFill/>
+        </p:spPr>
+        <p:txBody>
+          <a:bodyPr wrap="square" rtlCol="0" anchor="t" anchorCtr="0">
+            <a:spAutoFit/>
+          </a:bodyPr>
+          <a:lstStyle/>
+          <a:p>
+            <a:r>
+              <a:rPr lang="ru-RU" sz="2400" dirty="0">
+                <a:solidFill>
+                  <a:srgbClr val="102D69"/>
+                </a:solidFill>
+                <a:latin typeface="HSE Sans" panose="02000000000000000000" pitchFamily="2" charset="0"/>
+              </a:rPr>
+              <a:t>Выводы</a:t>
+            </a:r>
+          </a:p>
+        </p:txBody>
+      </p:sp>
+      <p:sp>
+        <p:nvSpPr>
+          <p:cNvPr id="9" name="TextBox 8">
+            <a:extLst>
+              <a:ext uri="{FF2B5EF4-FFF2-40B4-BE49-F238E27FC236}">
+                <a16:creationId xmlns:a16="http://schemas.microsoft.com/office/drawing/2014/main" id="{9C2449C7-481F-A47D-FC18-4726A69B8E68}"/>
               </a:ext>
             </a:extLst>
           </p:cNvPr>
@@ -25062,7 +26059,7 @@
         <p:spPr>
           <a:xfrm>
             <a:off x="585897" y="2704251"/>
-            <a:ext cx="10472628" cy="369332"/>
+            <a:ext cx="10472628" cy="2031325"/>
           </a:xfrm>
           <a:prstGeom prst="rect">
             <a:avLst/>
@@ -25075,14 +26072,64 @@
           </a:bodyPr>
           <a:lstStyle/>
           <a:p>
-            <a:pPr algn="ctr"/>
             <a:r>
               <a:rPr lang="ru-RU" dirty="0">
                 <a:solidFill>
                   <a:srgbClr val="102D69"/>
                 </a:solidFill>
               </a:rPr>
-              <a:t>Спасибо за внимание!</a:t>
+              <a:t>Разработан мультимодальный комплекс, снижающий неопределенность планирования.</a:t>
+            </a:r>
+          </a:p>
+          <a:p>
+            <a:endParaRPr lang="ru-RU" dirty="0">
+              <a:solidFill>
+                <a:srgbClr val="102D69"/>
+              </a:solidFill>
+            </a:endParaRPr>
+          </a:p>
+          <a:p>
+            <a:r>
+              <a:rPr lang="ru-RU" dirty="0">
+                <a:solidFill>
+                  <a:srgbClr val="102D69"/>
+                </a:solidFill>
+              </a:rPr>
+              <a:t>Научная новизна подтверждена учетом реальной данных процесса через визуальный анализ.</a:t>
+            </a:r>
+          </a:p>
+          <a:p>
+            <a:endParaRPr lang="ru-RU" dirty="0">
+              <a:solidFill>
+                <a:srgbClr val="102D69"/>
+              </a:solidFill>
+            </a:endParaRPr>
+          </a:p>
+          <a:p>
+            <a:r>
+              <a:rPr lang="ru-RU" dirty="0">
+                <a:solidFill>
+                  <a:srgbClr val="102D69"/>
+                </a:solidFill>
+              </a:rPr>
+              <a:t>Положена основа к разработке методологии к обработке и хранению данных</a:t>
+            </a:r>
+          </a:p>
+          <a:p>
+            <a:endParaRPr lang="ru-RU" dirty="0">
+              <a:solidFill>
+                <a:srgbClr val="102D69"/>
+              </a:solidFill>
+            </a:endParaRPr>
+          </a:p>
+          <a:p>
+            <a:r>
+              <a:rPr lang="ru-RU" dirty="0">
+                <a:solidFill>
+                  <a:srgbClr val="102D69"/>
+                </a:solidFill>
+              </a:rPr>
+              <a:t>Система готова к масштабированию и может использоваться в промышленной эксплуатации</a:t>
             </a:r>
           </a:p>
         </p:txBody>
@@ -25090,7 +26137,7 @@
     </p:spTree>
     <p:extLst>
       <p:ext uri="{BB962C8B-B14F-4D97-AF65-F5344CB8AC3E}">
-        <p14:creationId xmlns:p14="http://schemas.microsoft.com/office/powerpoint/2010/main" val="2110303229"/>
+        <p14:creationId xmlns:p14="http://schemas.microsoft.com/office/powerpoint/2010/main" val="3576663970"/>
       </p:ext>
     </p:extLst>
   </p:cSld>
@@ -25414,6 +26461,153 @@
     <p:extLst>
       <p:ext uri="{BB962C8B-B14F-4D97-AF65-F5344CB8AC3E}">
         <p14:creationId xmlns:p14="http://schemas.microsoft.com/office/powerpoint/2010/main" val="3233454757"/>
+      </p:ext>
+    </p:extLst>
+  </p:cSld>
+  <p:clrMapOvr>
+    <a:masterClrMapping/>
+  </p:clrMapOvr>
+</p:sld>
+</file>
+
+<file path=ppt/slides/slide20.xml><?xml version="1.0" encoding="utf-8"?>
+<p:sld xmlns:a="http://schemas.openxmlformats.org/drawingml/2006/main" xmlns:r="http://schemas.openxmlformats.org/officeDocument/2006/relationships" xmlns:p="http://schemas.openxmlformats.org/presentationml/2006/main">
+  <p:cSld>
+    <p:spTree>
+      <p:nvGrpSpPr>
+        <p:cNvPr id="1" name=""/>
+        <p:cNvGrpSpPr/>
+        <p:nvPr/>
+      </p:nvGrpSpPr>
+      <p:grpSpPr>
+        <a:xfrm>
+          <a:off x="0" y="0"/>
+          <a:ext cx="0" cy="0"/>
+          <a:chOff x="0" y="0"/>
+          <a:chExt cx="0" cy="0"/>
+        </a:xfrm>
+      </p:grpSpPr>
+      <p:sp>
+        <p:nvSpPr>
+          <p:cNvPr id="2" name="Текст 1">
+            <a:extLst>
+              <a:ext uri="{FF2B5EF4-FFF2-40B4-BE49-F238E27FC236}">
+                <a16:creationId xmlns:a16="http://schemas.microsoft.com/office/drawing/2014/main" id="{7AC8064E-5791-204C-B92F-A01827949435}"/>
+              </a:ext>
+            </a:extLst>
+          </p:cNvPr>
+          <p:cNvSpPr>
+            <a:spLocks noGrp="1"/>
+          </p:cNvSpPr>
+          <p:nvPr>
+            <p:ph type="body" sz="quarter" idx="13"/>
+          </p:nvPr>
+        </p:nvSpPr>
+        <p:spPr/>
+        <p:txBody>
+          <a:bodyPr/>
+          <a:lstStyle/>
+          <a:p>
+            <a:r>
+              <a:rPr lang="ru-RU" dirty="0"/>
+              <a:t>Магистратура</a:t>
+            </a:r>
+          </a:p>
+          <a:p>
+            <a:r>
+              <a:rPr lang="ru-RU" dirty="0"/>
+              <a:t>«Искусственный интеллект»</a:t>
+            </a:r>
+          </a:p>
+          <a:p>
+            <a:endParaRPr lang="ru-RU" dirty="0"/>
+          </a:p>
+          <a:p>
+            <a:endParaRPr lang="ru-RU" dirty="0"/>
+          </a:p>
+        </p:txBody>
+      </p:sp>
+      <p:sp>
+        <p:nvSpPr>
+          <p:cNvPr id="3" name="Текст 2">
+            <a:extLst>
+              <a:ext uri="{FF2B5EF4-FFF2-40B4-BE49-F238E27FC236}">
+                <a16:creationId xmlns:a16="http://schemas.microsoft.com/office/drawing/2014/main" id="{C5A111DD-C00C-2D48-9F7A-4E23C5BA0C63}"/>
+              </a:ext>
+            </a:extLst>
+          </p:cNvPr>
+          <p:cNvSpPr>
+            <a:spLocks noGrp="1"/>
+          </p:cNvSpPr>
+          <p:nvPr>
+            <p:ph type="body" sz="quarter" idx="14"/>
+          </p:nvPr>
+        </p:nvSpPr>
+        <p:spPr/>
+        <p:txBody>
+          <a:bodyPr/>
+          <a:lstStyle/>
+          <a:p>
+            <a:r>
+              <a:rPr lang="ru-RU" dirty="0"/>
+              <a:t>Планирование работы фрезерных станков с использованием ИИ</a:t>
+            </a:r>
+          </a:p>
+          <a:p>
+            <a:endParaRPr lang="ru-RU" dirty="0"/>
+          </a:p>
+          <a:p>
+            <a:endParaRPr lang="ru-RU" dirty="0"/>
+          </a:p>
+          <a:p>
+            <a:endParaRPr lang="ru-RU" dirty="0"/>
+          </a:p>
+        </p:txBody>
+      </p:sp>
+      <p:sp>
+        <p:nvSpPr>
+          <p:cNvPr id="7" name="TextBox 6">
+            <a:extLst>
+              <a:ext uri="{FF2B5EF4-FFF2-40B4-BE49-F238E27FC236}">
+                <a16:creationId xmlns:a16="http://schemas.microsoft.com/office/drawing/2014/main" id="{DFE8B687-BEA0-9194-E7C0-E7DB28F1FC51}"/>
+              </a:ext>
+            </a:extLst>
+          </p:cNvPr>
+          <p:cNvSpPr txBox="1"/>
+          <p:nvPr/>
+        </p:nvSpPr>
+        <p:spPr>
+          <a:xfrm>
+            <a:off x="585897" y="2704251"/>
+            <a:ext cx="10472628" cy="369332"/>
+          </a:xfrm>
+          <a:prstGeom prst="rect">
+            <a:avLst/>
+          </a:prstGeom>
+          <a:noFill/>
+        </p:spPr>
+        <p:txBody>
+          <a:bodyPr wrap="square">
+            <a:spAutoFit/>
+          </a:bodyPr>
+          <a:lstStyle/>
+          <a:p>
+            <a:pPr algn="ctr"/>
+            <a:r>
+              <a:rPr lang="ru-RU" dirty="0">
+                <a:solidFill>
+                  <a:srgbClr val="102D69"/>
+                </a:solidFill>
+              </a:rPr>
+              <a:t>Спасибо за внимание!</a:t>
+            </a:r>
+          </a:p>
+        </p:txBody>
+      </p:sp>
+    </p:spTree>
+    <p:extLst>
+      <p:ext uri="{BB962C8B-B14F-4D97-AF65-F5344CB8AC3E}">
+        <p14:creationId xmlns:p14="http://schemas.microsoft.com/office/powerpoint/2010/main" val="2110303229"/>
       </p:ext>
     </p:extLst>
   </p:cSld>
